--- a/secure-protocol/out/secure_protocol_template.pptx
+++ b/secure-protocol/out/secure_protocol_template.pptx
@@ -6422,10 +6422,18 @@
           <a:lstStyle/>
           <a:p>
             <a:r>
-              <a:rPr lang="zh-CN" altLang="en-US" dirty="0"/>
+              <a:rPr lang="zh-CN" altLang="en-US" dirty="0">
+                <a:solidFill>
+                  <a:srgbClr val="FF0000"/>
+                </a:solidFill>
+              </a:rPr>
               <a:t>建立连接的命令</a:t>
             </a:r>
-            <a:endParaRPr lang="en-US" altLang="zh-CN" dirty="0"/>
+            <a:endParaRPr lang="en-US" altLang="zh-CN" dirty="0">
+              <a:solidFill>
+                <a:srgbClr val="FF0000"/>
+              </a:solidFill>
+            </a:endParaRPr>
           </a:p>
           <a:p>
             <a:r>
